--- a/game-design/sbs-game-academy/화면 및 캐릭터의 스크롤 플로우차트.pptx
+++ b/game-design/sbs-game-academy/화면 및 캐릭터의 스크롤 플로우차트.pptx
@@ -3725,7 +3725,7 @@
         </p:nvSpPr>
         <p:spPr>
           <a:xfrm>
-            <a:off x="4008280" y="4829429"/>
+            <a:off x="6571455" y="3789642"/>
             <a:ext cx="1510018" cy="572915"/>
           </a:xfrm>
           <a:prstGeom prst="flowChartDecision">
@@ -3780,14 +3780,14 @@
           <p:cNvCxnSpPr>
             <a:cxnSpLocks/>
             <a:stCxn id="80" idx="2"/>
-            <a:endCxn id="193" idx="0"/>
+            <a:endCxn id="399" idx="0"/>
           </p:cNvCxnSpPr>
           <p:nvPr/>
         </p:nvCxnSpPr>
         <p:spPr>
           <a:xfrm>
             <a:off x="4760838" y="4557038"/>
-            <a:ext cx="2451" cy="272391"/>
+            <a:ext cx="2452" cy="1226672"/>
           </a:xfrm>
           <a:prstGeom prst="straightConnector1">
             <a:avLst/>
@@ -4152,15 +4152,15 @@
           </p:cNvPr>
           <p:cNvCxnSpPr>
             <a:cxnSpLocks/>
-            <a:stCxn id="193" idx="3"/>
-            <a:endCxn id="362" idx="1"/>
+            <a:stCxn id="449" idx="2"/>
+            <a:endCxn id="193" idx="0"/>
           </p:cNvCxnSpPr>
           <p:nvPr/>
         </p:nvCxnSpPr>
         <p:spPr>
-          <a:xfrm flipV="1">
-            <a:off x="5518298" y="5115886"/>
-            <a:ext cx="580154" cy="1"/>
+          <a:xfrm>
+            <a:off x="7326464" y="3526406"/>
+            <a:ext cx="0" cy="263236"/>
           </a:xfrm>
           <a:prstGeom prst="straightConnector1">
             <a:avLst/>
@@ -4261,16 +4261,15 @@
           <p:cNvCxnSpPr>
             <a:cxnSpLocks/>
             <a:stCxn id="193" idx="2"/>
-            <a:endCxn id="399" idx="0"/>
           </p:cNvCxnSpPr>
           <p:nvPr/>
         </p:nvCxnSpPr>
         <p:spPr>
-          <a:xfrm>
-            <a:off x="4763289" y="5402344"/>
-            <a:ext cx="1" cy="381366"/>
-          </a:xfrm>
-          <a:prstGeom prst="straightConnector1">
+          <a:xfrm rot="5400000">
+            <a:off x="5799562" y="3320155"/>
+            <a:ext cx="484501" cy="2569305"/>
+          </a:xfrm>
+          <a:prstGeom prst="bentConnector2">
             <a:avLst/>
           </a:prstGeom>
           <a:ln>
@@ -4341,10 +4340,10 @@
       </p:sp>
       <p:sp>
         <p:nvSpPr>
-          <p:cNvPr id="354" name="TextBox 353">
-            <a:extLst>
-              <a:ext uri="{FF2B5EF4-FFF2-40B4-BE49-F238E27FC236}">
-                <a16:creationId xmlns:a16="http://schemas.microsoft.com/office/drawing/2014/main" id="{00018837-1984-40B6-AAEB-1AE6E5ED2ABC}"/>
+          <p:cNvPr id="355" name="TextBox 354">
+            <a:extLst>
+              <a:ext uri="{FF2B5EF4-FFF2-40B4-BE49-F238E27FC236}">
+                <a16:creationId xmlns:a16="http://schemas.microsoft.com/office/drawing/2014/main" id="{02AF2F67-3F53-412B-A336-34ED05A7D7DF}"/>
               </a:ext>
             </a:extLst>
           </p:cNvPr>
@@ -4353,8 +4352,8 @@
         </p:nvSpPr>
         <p:spPr>
           <a:xfrm>
-            <a:off x="4492908" y="5415327"/>
-            <a:ext cx="378705" cy="246221"/>
+            <a:off x="5971477" y="2294223"/>
+            <a:ext cx="410690" cy="246221"/>
           </a:xfrm>
           <a:prstGeom prst="rect">
             <a:avLst/>
@@ -4385,50 +4384,6 @@
       </p:sp>
       <p:sp>
         <p:nvSpPr>
-          <p:cNvPr id="355" name="TextBox 354">
-            <a:extLst>
-              <a:ext uri="{FF2B5EF4-FFF2-40B4-BE49-F238E27FC236}">
-                <a16:creationId xmlns:a16="http://schemas.microsoft.com/office/drawing/2014/main" id="{02AF2F67-3F53-412B-A336-34ED05A7D7DF}"/>
-              </a:ext>
-            </a:extLst>
-          </p:cNvPr>
-          <p:cNvSpPr txBox="1"/>
-          <p:nvPr/>
-        </p:nvSpPr>
-        <p:spPr>
-          <a:xfrm>
-            <a:off x="5971477" y="2294223"/>
-            <a:ext cx="410690" cy="246221"/>
-          </a:xfrm>
-          <a:prstGeom prst="rect">
-            <a:avLst/>
-          </a:prstGeom>
-          <a:noFill/>
-        </p:spPr>
-        <p:txBody>
-          <a:bodyPr wrap="square" rtlCol="0">
-            <a:spAutoFit/>
-          </a:bodyPr>
-          <a:lstStyle/>
-          <a:p>
-            <a:r>
-              <a:rPr lang="en-US" altLang="ko-KR" sz="1000" b="1" dirty="0">
-                <a:solidFill>
-                  <a:srgbClr val="FF0000"/>
-                </a:solidFill>
-              </a:rPr>
-              <a:t>N</a:t>
-            </a:r>
-            <a:endParaRPr lang="ko-KR" altLang="en-US" sz="1000" b="1" dirty="0">
-              <a:solidFill>
-                <a:srgbClr val="FF0000"/>
-              </a:solidFill>
-            </a:endParaRPr>
-          </a:p>
-        </p:txBody>
-      </p:sp>
-      <p:sp>
-        <p:nvSpPr>
           <p:cNvPr id="356" name="TextBox 355">
             <a:extLst>
               <a:ext uri="{FF2B5EF4-FFF2-40B4-BE49-F238E27FC236}">
@@ -4485,7 +4440,7 @@
         </p:nvSpPr>
         <p:spPr>
           <a:xfrm>
-            <a:off x="5668960" y="4917604"/>
+            <a:off x="7321207" y="3526406"/>
             <a:ext cx="410690" cy="246221"/>
           </a:xfrm>
           <a:prstGeom prst="rect">
@@ -4573,7 +4528,7 @@
         </p:nvSpPr>
         <p:spPr>
           <a:xfrm>
-            <a:off x="6098452" y="4935522"/>
+            <a:off x="8724199" y="3887995"/>
             <a:ext cx="1279322" cy="360727"/>
           </a:xfrm>
           <a:prstGeom prst="flowChartProcess">
@@ -4628,19 +4583,18 @@
           </p:cNvPr>
           <p:cNvCxnSpPr>
             <a:cxnSpLocks/>
-            <a:stCxn id="10" idx="3"/>
+            <a:stCxn id="10" idx="2"/>
+            <a:endCxn id="449" idx="0"/>
           </p:cNvCxnSpPr>
           <p:nvPr/>
         </p:nvCxnSpPr>
         <p:spPr>
-          <a:xfrm flipH="1" flipV="1">
-            <a:off x="4757160" y="1455614"/>
-            <a:ext cx="3223981" cy="838610"/>
-          </a:xfrm>
-          <a:prstGeom prst="bentConnector3">
-            <a:avLst>
-              <a:gd name="adj1" fmla="val -7091"/>
-            </a:avLst>
+          <a:xfrm>
+            <a:off x="7321207" y="2474587"/>
+            <a:ext cx="5257" cy="478904"/>
+          </a:xfrm>
+          <a:prstGeom prst="straightConnector1">
+            <a:avLst/>
           </a:prstGeom>
           <a:ln>
             <a:tailEnd type="triangle"/>
@@ -4897,14 +4851,14 @@
           </p:cNvPr>
           <p:cNvCxnSpPr>
             <a:cxnSpLocks/>
-            <a:stCxn id="362" idx="0"/>
+            <a:stCxn id="362" idx="2"/>
           </p:cNvCxnSpPr>
           <p:nvPr/>
         </p:nvCxnSpPr>
         <p:spPr>
-          <a:xfrm rot="16200000" flipV="1">
-            <a:off x="5290296" y="3487704"/>
-            <a:ext cx="914683" cy="1980953"/>
+          <a:xfrm rot="5400000">
+            <a:off x="6486214" y="2519668"/>
+            <a:ext cx="1148593" cy="4606700"/>
           </a:xfrm>
           <a:prstGeom prst="bentConnector2">
             <a:avLst/>
@@ -4928,6 +4882,235 @@
           </a:fontRef>
         </p:style>
       </p:cxnSp>
+      <p:sp>
+        <p:nvSpPr>
+          <p:cNvPr id="449" name="순서도: 판단 448">
+            <a:extLst>
+              <a:ext uri="{FF2B5EF4-FFF2-40B4-BE49-F238E27FC236}">
+                <a16:creationId xmlns:a16="http://schemas.microsoft.com/office/drawing/2014/main" id="{7E8F12A9-FF1D-4209-90DB-0CEE063B69E6}"/>
+              </a:ext>
+            </a:extLst>
+          </p:cNvPr>
+          <p:cNvSpPr/>
+          <p:nvPr/>
+        </p:nvSpPr>
+        <p:spPr>
+          <a:xfrm>
+            <a:off x="6571455" y="2953491"/>
+            <a:ext cx="1510018" cy="572915"/>
+          </a:xfrm>
+          <a:prstGeom prst="flowChartDecision">
+            <a:avLst/>
+          </a:prstGeom>
+        </p:spPr>
+        <p:style>
+          <a:lnRef idx="2">
+            <a:schemeClr val="accent1">
+              <a:shade val="50000"/>
+            </a:schemeClr>
+          </a:lnRef>
+          <a:fillRef idx="1">
+            <a:schemeClr val="accent1"/>
+          </a:fillRef>
+          <a:effectRef idx="0">
+            <a:schemeClr val="accent1"/>
+          </a:effectRef>
+          <a:fontRef idx="minor">
+            <a:schemeClr val="lt1"/>
+          </a:fontRef>
+        </p:style>
+        <p:txBody>
+          <a:bodyPr rtlCol="0" anchor="ctr"/>
+          <a:lstStyle/>
+          <a:p>
+            <a:pPr algn="ctr"/>
+            <a:r>
+              <a:rPr lang="ko-KR" altLang="en-US" sz="1000" b="1" dirty="0"/>
+              <a:t>화면 끝 도달</a:t>
+            </a:r>
+            <a:r>
+              <a:rPr lang="en-US" altLang="ko-KR" sz="1000" b="1" dirty="0"/>
+              <a:t>?</a:t>
+            </a:r>
+          </a:p>
+        </p:txBody>
+      </p:sp>
+      <p:cxnSp>
+        <p:nvCxnSpPr>
+          <p:cNvPr id="454" name="연결선: 꺾임 453">
+            <a:extLst>
+              <a:ext uri="{FF2B5EF4-FFF2-40B4-BE49-F238E27FC236}">
+                <a16:creationId xmlns:a16="http://schemas.microsoft.com/office/drawing/2014/main" id="{44580202-9A06-4A65-BB7D-5ACEAD24111C}"/>
+              </a:ext>
+            </a:extLst>
+          </p:cNvPr>
+          <p:cNvCxnSpPr>
+            <a:stCxn id="449" idx="3"/>
+          </p:cNvCxnSpPr>
+          <p:nvPr/>
+        </p:nvCxnSpPr>
+        <p:spPr>
+          <a:xfrm flipH="1" flipV="1">
+            <a:off x="4757160" y="1431825"/>
+            <a:ext cx="3324313" cy="1808124"/>
+          </a:xfrm>
+          <a:prstGeom prst="bentConnector3">
+            <a:avLst>
+              <a:gd name="adj1" fmla="val -6877"/>
+            </a:avLst>
+          </a:prstGeom>
+          <a:ln>
+            <a:solidFill>
+              <a:srgbClr val="FF0000"/>
+            </a:solidFill>
+            <a:tailEnd type="triangle"/>
+          </a:ln>
+        </p:spPr>
+        <p:style>
+          <a:lnRef idx="3">
+            <a:schemeClr val="accent2"/>
+          </a:lnRef>
+          <a:fillRef idx="0">
+            <a:schemeClr val="accent2"/>
+          </a:fillRef>
+          <a:effectRef idx="2">
+            <a:schemeClr val="accent2"/>
+          </a:effectRef>
+          <a:fontRef idx="minor">
+            <a:schemeClr val="tx1"/>
+          </a:fontRef>
+        </p:style>
+      </p:cxnSp>
+      <p:sp>
+        <p:nvSpPr>
+          <p:cNvPr id="455" name="TextBox 454">
+            <a:extLst>
+              <a:ext uri="{FF2B5EF4-FFF2-40B4-BE49-F238E27FC236}">
+                <a16:creationId xmlns:a16="http://schemas.microsoft.com/office/drawing/2014/main" id="{EA6F7098-DF3F-494A-83AE-8B357BF7EA1B}"/>
+              </a:ext>
+            </a:extLst>
+          </p:cNvPr>
+          <p:cNvSpPr txBox="1"/>
+          <p:nvPr/>
+        </p:nvSpPr>
+        <p:spPr>
+          <a:xfrm>
+            <a:off x="8252892" y="2294222"/>
+            <a:ext cx="378705" cy="246221"/>
+          </a:xfrm>
+          <a:prstGeom prst="rect">
+            <a:avLst/>
+          </a:prstGeom>
+          <a:noFill/>
+        </p:spPr>
+        <p:txBody>
+          <a:bodyPr wrap="square" rtlCol="0">
+            <a:spAutoFit/>
+          </a:bodyPr>
+          <a:lstStyle/>
+          <a:p>
+            <a:r>
+              <a:rPr lang="en-US" altLang="ko-KR" sz="1000" b="1" dirty="0">
+                <a:solidFill>
+                  <a:srgbClr val="FF0000"/>
+                </a:solidFill>
+              </a:rPr>
+              <a:t>N</a:t>
+            </a:r>
+            <a:endParaRPr lang="ko-KR" altLang="en-US" sz="1000" b="1" dirty="0">
+              <a:solidFill>
+                <a:srgbClr val="FF0000"/>
+              </a:solidFill>
+            </a:endParaRPr>
+          </a:p>
+        </p:txBody>
+      </p:sp>
+      <p:cxnSp>
+        <p:nvCxnSpPr>
+          <p:cNvPr id="464" name="직선 화살표 연결선 463">
+            <a:extLst>
+              <a:ext uri="{FF2B5EF4-FFF2-40B4-BE49-F238E27FC236}">
+                <a16:creationId xmlns:a16="http://schemas.microsoft.com/office/drawing/2014/main" id="{34CBD243-13EF-4A5F-B08F-E892A83EE53C}"/>
+              </a:ext>
+            </a:extLst>
+          </p:cNvPr>
+          <p:cNvCxnSpPr>
+            <a:stCxn id="193" idx="3"/>
+            <a:endCxn id="362" idx="1"/>
+          </p:cNvCxnSpPr>
+          <p:nvPr/>
+        </p:nvCxnSpPr>
+        <p:spPr>
+          <a:xfrm flipV="1">
+            <a:off x="8081473" y="4068359"/>
+            <a:ext cx="642726" cy="7741"/>
+          </a:xfrm>
+          <a:prstGeom prst="straightConnector1">
+            <a:avLst/>
+          </a:prstGeom>
+          <a:ln>
+            <a:tailEnd type="triangle"/>
+          </a:ln>
+        </p:spPr>
+        <p:style>
+          <a:lnRef idx="3">
+            <a:schemeClr val="accent1"/>
+          </a:lnRef>
+          <a:fillRef idx="0">
+            <a:schemeClr val="accent1"/>
+          </a:fillRef>
+          <a:effectRef idx="2">
+            <a:schemeClr val="accent1"/>
+          </a:effectRef>
+          <a:fontRef idx="minor">
+            <a:schemeClr val="tx1"/>
+          </a:fontRef>
+        </p:style>
+      </p:cxnSp>
+      <p:sp>
+        <p:nvSpPr>
+          <p:cNvPr id="467" name="TextBox 466">
+            <a:extLst>
+              <a:ext uri="{FF2B5EF4-FFF2-40B4-BE49-F238E27FC236}">
+                <a16:creationId xmlns:a16="http://schemas.microsoft.com/office/drawing/2014/main" id="{31D01362-3EEE-48EB-8325-773650BF5B01}"/>
+              </a:ext>
+            </a:extLst>
+          </p:cNvPr>
+          <p:cNvSpPr txBox="1"/>
+          <p:nvPr/>
+        </p:nvSpPr>
+        <p:spPr>
+          <a:xfrm>
+            <a:off x="8220907" y="3821090"/>
+            <a:ext cx="410690" cy="246221"/>
+          </a:xfrm>
+          <a:prstGeom prst="rect">
+            <a:avLst/>
+          </a:prstGeom>
+          <a:noFill/>
+        </p:spPr>
+        <p:txBody>
+          <a:bodyPr wrap="square" rtlCol="0">
+            <a:spAutoFit/>
+          </a:bodyPr>
+          <a:lstStyle/>
+          <a:p>
+            <a:r>
+              <a:rPr lang="en-US" altLang="ko-KR" sz="1000" b="1" dirty="0">
+                <a:solidFill>
+                  <a:schemeClr val="accent1"/>
+                </a:solidFill>
+              </a:rPr>
+              <a:t>Y</a:t>
+            </a:r>
+            <a:endParaRPr lang="ko-KR" altLang="en-US" sz="1000" b="1" dirty="0">
+              <a:solidFill>
+                <a:schemeClr val="accent1"/>
+              </a:solidFill>
+            </a:endParaRPr>
+          </a:p>
+        </p:txBody>
+      </p:sp>
     </p:spTree>
     <p:extLst>
       <p:ext uri="{BB962C8B-B14F-4D97-AF65-F5344CB8AC3E}">

--- a/game-design/sbs-game-academy/화면 및 캐릭터의 스크롤 플로우차트.pptx
+++ b/game-design/sbs-game-academy/화면 및 캐릭터의 스크롤 플로우차트.pptx
@@ -4069,7 +4069,7 @@
         <p:spPr>
           <a:xfrm flipV="1">
             <a:off x="5649193" y="1897560"/>
-            <a:ext cx="633375" cy="913684"/>
+            <a:ext cx="348036" cy="913684"/>
           </a:xfrm>
           <a:prstGeom prst="bentConnector2">
             <a:avLst/>
@@ -4141,49 +4141,6 @@
           </a:fontRef>
         </p:style>
       </p:cxnSp>
-      <p:cxnSp>
-        <p:nvCxnSpPr>
-          <p:cNvPr id="321" name="직선 화살표 연결선 320">
-            <a:extLst>
-              <a:ext uri="{FF2B5EF4-FFF2-40B4-BE49-F238E27FC236}">
-                <a16:creationId xmlns:a16="http://schemas.microsoft.com/office/drawing/2014/main" id="{06986269-29F8-4F05-8F33-A2A03898661C}"/>
-              </a:ext>
-            </a:extLst>
-          </p:cNvPr>
-          <p:cNvCxnSpPr>
-            <a:cxnSpLocks/>
-            <a:stCxn id="449" idx="2"/>
-            <a:endCxn id="193" idx="0"/>
-          </p:cNvCxnSpPr>
-          <p:nvPr/>
-        </p:nvCxnSpPr>
-        <p:spPr>
-          <a:xfrm>
-            <a:off x="7326464" y="3526406"/>
-            <a:ext cx="0" cy="263236"/>
-          </a:xfrm>
-          <a:prstGeom prst="straightConnector1">
-            <a:avLst/>
-          </a:prstGeom>
-          <a:ln>
-            <a:tailEnd type="triangle"/>
-          </a:ln>
-        </p:spPr>
-        <p:style>
-          <a:lnRef idx="3">
-            <a:schemeClr val="accent1"/>
-          </a:lnRef>
-          <a:fillRef idx="0">
-            <a:schemeClr val="accent1"/>
-          </a:fillRef>
-          <a:effectRef idx="2">
-            <a:schemeClr val="accent1"/>
-          </a:effectRef>
-          <a:fontRef idx="minor">
-            <a:schemeClr val="tx1"/>
-          </a:fontRef>
-        </p:style>
-      </p:cxnSp>
       <p:sp>
         <p:nvSpPr>
           <p:cNvPr id="322" name="순서도: 판단 321">
@@ -4249,51 +4206,6 @@
           </a:p>
         </p:txBody>
       </p:sp>
-      <p:cxnSp>
-        <p:nvCxnSpPr>
-          <p:cNvPr id="346" name="직선 화살표 연결선 345">
-            <a:extLst>
-              <a:ext uri="{FF2B5EF4-FFF2-40B4-BE49-F238E27FC236}">
-                <a16:creationId xmlns:a16="http://schemas.microsoft.com/office/drawing/2014/main" id="{15576E2A-0B1F-4882-816F-48F38B8F587B}"/>
-              </a:ext>
-            </a:extLst>
-          </p:cNvPr>
-          <p:cNvCxnSpPr>
-            <a:cxnSpLocks/>
-            <a:stCxn id="193" idx="2"/>
-          </p:cNvCxnSpPr>
-          <p:nvPr/>
-        </p:nvCxnSpPr>
-        <p:spPr>
-          <a:xfrm rot="5400000">
-            <a:off x="5799562" y="3320155"/>
-            <a:ext cx="484501" cy="2569305"/>
-          </a:xfrm>
-          <a:prstGeom prst="bentConnector2">
-            <a:avLst/>
-          </a:prstGeom>
-          <a:ln>
-            <a:solidFill>
-              <a:srgbClr val="FF0000"/>
-            </a:solidFill>
-            <a:tailEnd type="triangle"/>
-          </a:ln>
-        </p:spPr>
-        <p:style>
-          <a:lnRef idx="3">
-            <a:schemeClr val="accent2"/>
-          </a:lnRef>
-          <a:fillRef idx="0">
-            <a:schemeClr val="accent2"/>
-          </a:fillRef>
-          <a:effectRef idx="2">
-            <a:schemeClr val="accent2"/>
-          </a:effectRef>
-          <a:fontRef idx="minor">
-            <a:schemeClr val="tx1"/>
-          </a:fontRef>
-        </p:style>
-      </p:cxnSp>
       <p:sp>
         <p:nvSpPr>
           <p:cNvPr id="350" name="TextBox 349">
@@ -4352,7 +4264,7 @@
         </p:nvSpPr>
         <p:spPr>
           <a:xfrm>
-            <a:off x="5971477" y="2294223"/>
+            <a:off x="5755106" y="2234470"/>
             <a:ext cx="410690" cy="246221"/>
           </a:xfrm>
           <a:prstGeom prst="rect">
@@ -4428,10 +4340,10 @@
       </p:sp>
       <p:sp>
         <p:nvSpPr>
-          <p:cNvPr id="358" name="TextBox 357">
-            <a:extLst>
-              <a:ext uri="{FF2B5EF4-FFF2-40B4-BE49-F238E27FC236}">
-                <a16:creationId xmlns:a16="http://schemas.microsoft.com/office/drawing/2014/main" id="{6900BFFB-F29B-4C09-8F99-B051CA76FABA}"/>
+          <p:cNvPr id="359" name="TextBox 358">
+            <a:extLst>
+              <a:ext uri="{FF2B5EF4-FFF2-40B4-BE49-F238E27FC236}">
+                <a16:creationId xmlns:a16="http://schemas.microsoft.com/office/drawing/2014/main" id="{66E95859-DA00-4573-B7B1-48C566FE103E}"/>
               </a:ext>
             </a:extLst>
           </p:cNvPr>
@@ -4440,7 +4352,7 @@
         </p:nvSpPr>
         <p:spPr>
           <a:xfrm>
-            <a:off x="7321207" y="3526406"/>
+            <a:off x="4505529" y="3150177"/>
             <a:ext cx="410690" cy="246221"/>
           </a:xfrm>
           <a:prstGeom prst="rect">
@@ -4472,50 +4384,6 @@
       </p:sp>
       <p:sp>
         <p:nvSpPr>
-          <p:cNvPr id="359" name="TextBox 358">
-            <a:extLst>
-              <a:ext uri="{FF2B5EF4-FFF2-40B4-BE49-F238E27FC236}">
-                <a16:creationId xmlns:a16="http://schemas.microsoft.com/office/drawing/2014/main" id="{66E95859-DA00-4573-B7B1-48C566FE103E}"/>
-              </a:ext>
-            </a:extLst>
-          </p:cNvPr>
-          <p:cNvSpPr txBox="1"/>
-          <p:nvPr/>
-        </p:nvSpPr>
-        <p:spPr>
-          <a:xfrm>
-            <a:off x="4505529" y="3150177"/>
-            <a:ext cx="410690" cy="246221"/>
-          </a:xfrm>
-          <a:prstGeom prst="rect">
-            <a:avLst/>
-          </a:prstGeom>
-          <a:noFill/>
-        </p:spPr>
-        <p:txBody>
-          <a:bodyPr wrap="square" rtlCol="0">
-            <a:spAutoFit/>
-          </a:bodyPr>
-          <a:lstStyle/>
-          <a:p>
-            <a:r>
-              <a:rPr lang="en-US" altLang="ko-KR" sz="1000" b="1" dirty="0">
-                <a:solidFill>
-                  <a:schemeClr val="accent1"/>
-                </a:solidFill>
-              </a:rPr>
-              <a:t>Y</a:t>
-            </a:r>
-            <a:endParaRPr lang="ko-KR" altLang="en-US" sz="1000" b="1" dirty="0">
-              <a:solidFill>
-                <a:schemeClr val="accent1"/>
-              </a:solidFill>
-            </a:endParaRPr>
-          </a:p>
-        </p:txBody>
-      </p:sp>
-      <p:sp>
-        <p:nvSpPr>
           <p:cNvPr id="362" name="순서도: 처리 361">
             <a:extLst>
               <a:ext uri="{FF2B5EF4-FFF2-40B4-BE49-F238E27FC236}">
@@ -4528,7 +4396,7 @@
         </p:nvSpPr>
         <p:spPr>
           <a:xfrm>
-            <a:off x="8724199" y="3887995"/>
+            <a:off x="6693259" y="5006158"/>
             <a:ext cx="1279322" cy="360727"/>
           </a:xfrm>
           <a:prstGeom prst="flowChartProcess">
@@ -4584,14 +4452,14 @@
           <p:cNvCxnSpPr>
             <a:cxnSpLocks/>
             <a:stCxn id="10" idx="2"/>
-            <a:endCxn id="449" idx="0"/>
+            <a:endCxn id="193" idx="0"/>
           </p:cNvCxnSpPr>
           <p:nvPr/>
         </p:nvCxnSpPr>
         <p:spPr>
           <a:xfrm>
             <a:off x="7321207" y="2474587"/>
-            <a:ext cx="5257" cy="478904"/>
+            <a:ext cx="5257" cy="1315055"/>
           </a:xfrm>
           <a:prstGeom prst="straightConnector1">
             <a:avLst/>
@@ -4681,8 +4549,8 @@
         </p:nvCxnSpPr>
         <p:spPr>
           <a:xfrm flipV="1">
-            <a:off x="5515846" y="2811243"/>
-            <a:ext cx="660976" cy="839184"/>
+            <a:off x="5515846" y="1907654"/>
+            <a:ext cx="835244" cy="1742773"/>
           </a:xfrm>
           <a:prstGeom prst="bentConnector2">
             <a:avLst/>
@@ -4720,7 +4588,7 @@
         </p:nvSpPr>
         <p:spPr>
           <a:xfrm>
-            <a:off x="5943549" y="3141796"/>
+            <a:off x="6137622" y="3144205"/>
             <a:ext cx="410690" cy="246221"/>
           </a:xfrm>
           <a:prstGeom prst="rect">
@@ -4851,16 +4719,16 @@
           </p:cNvPr>
           <p:cNvCxnSpPr>
             <a:cxnSpLocks/>
-            <a:stCxn id="362" idx="2"/>
+            <a:stCxn id="362" idx="1"/>
           </p:cNvCxnSpPr>
           <p:nvPr/>
         </p:nvCxnSpPr>
         <p:spPr>
-          <a:xfrm rot="5400000">
-            <a:off x="6486214" y="2519668"/>
-            <a:ext cx="1148593" cy="4606700"/>
-          </a:xfrm>
-          <a:prstGeom prst="bentConnector2">
+          <a:xfrm flipH="1">
+            <a:off x="4766081" y="5186522"/>
+            <a:ext cx="1927178" cy="0"/>
+          </a:xfrm>
+          <a:prstGeom prst="straightConnector1">
             <a:avLst/>
           </a:prstGeom>
           <a:ln>
@@ -4882,59 +4750,6 @@
           </a:fontRef>
         </p:style>
       </p:cxnSp>
-      <p:sp>
-        <p:nvSpPr>
-          <p:cNvPr id="449" name="순서도: 판단 448">
-            <a:extLst>
-              <a:ext uri="{FF2B5EF4-FFF2-40B4-BE49-F238E27FC236}">
-                <a16:creationId xmlns:a16="http://schemas.microsoft.com/office/drawing/2014/main" id="{7E8F12A9-FF1D-4209-90DB-0CEE063B69E6}"/>
-              </a:ext>
-            </a:extLst>
-          </p:cNvPr>
-          <p:cNvSpPr/>
-          <p:nvPr/>
-        </p:nvSpPr>
-        <p:spPr>
-          <a:xfrm>
-            <a:off x="6571455" y="2953491"/>
-            <a:ext cx="1510018" cy="572915"/>
-          </a:xfrm>
-          <a:prstGeom prst="flowChartDecision">
-            <a:avLst/>
-          </a:prstGeom>
-        </p:spPr>
-        <p:style>
-          <a:lnRef idx="2">
-            <a:schemeClr val="accent1">
-              <a:shade val="50000"/>
-            </a:schemeClr>
-          </a:lnRef>
-          <a:fillRef idx="1">
-            <a:schemeClr val="accent1"/>
-          </a:fillRef>
-          <a:effectRef idx="0">
-            <a:schemeClr val="accent1"/>
-          </a:effectRef>
-          <a:fontRef idx="minor">
-            <a:schemeClr val="lt1"/>
-          </a:fontRef>
-        </p:style>
-        <p:txBody>
-          <a:bodyPr rtlCol="0" anchor="ctr"/>
-          <a:lstStyle/>
-          <a:p>
-            <a:pPr algn="ctr"/>
-            <a:r>
-              <a:rPr lang="ko-KR" altLang="en-US" sz="1000" b="1" dirty="0"/>
-              <a:t>화면 끝 도달</a:t>
-            </a:r>
-            <a:r>
-              <a:rPr lang="en-US" altLang="ko-KR" sz="1000" b="1" dirty="0"/>
-              <a:t>?</a:t>
-            </a:r>
-          </a:p>
-        </p:txBody>
-      </p:sp>
       <p:cxnSp>
         <p:nvCxnSpPr>
           <p:cNvPr id="454" name="연결선: 꺾임 453">
@@ -4945,14 +4760,15 @@
             </a:extLst>
           </p:cNvPr>
           <p:cNvCxnSpPr>
-            <a:stCxn id="449" idx="3"/>
+            <a:cxnSpLocks/>
+            <a:stCxn id="193" idx="3"/>
           </p:cNvCxnSpPr>
           <p:nvPr/>
         </p:nvCxnSpPr>
         <p:spPr>
           <a:xfrm flipH="1" flipV="1">
-            <a:off x="4757160" y="1431825"/>
-            <a:ext cx="3324313" cy="1808124"/>
+            <a:off x="4757161" y="1431826"/>
+            <a:ext cx="3324312" cy="2644274"/>
           </a:xfrm>
           <a:prstGeom prst="bentConnector3">
             <a:avLst>
@@ -5035,15 +4851,16 @@
             </a:extLst>
           </p:cNvPr>
           <p:cNvCxnSpPr>
-            <a:stCxn id="193" idx="3"/>
-            <a:endCxn id="362" idx="1"/>
+            <a:cxnSpLocks/>
+            <a:stCxn id="193" idx="2"/>
+            <a:endCxn id="362" idx="0"/>
           </p:cNvCxnSpPr>
           <p:nvPr/>
         </p:nvCxnSpPr>
         <p:spPr>
-          <a:xfrm flipV="1">
-            <a:off x="8081473" y="4068359"/>
-            <a:ext cx="642726" cy="7741"/>
+          <a:xfrm>
+            <a:off x="7326464" y="4362557"/>
+            <a:ext cx="6456" cy="643601"/>
           </a:xfrm>
           <a:prstGeom prst="straightConnector1">
             <a:avLst/>
@@ -5081,7 +4898,7 @@
         </p:nvSpPr>
         <p:spPr>
           <a:xfrm>
-            <a:off x="8220907" y="3821090"/>
+            <a:off x="7321207" y="4522320"/>
             <a:ext cx="410690" cy="246221"/>
           </a:xfrm>
           <a:prstGeom prst="rect">

--- a/game-design/sbs-game-academy/화면 및 캐릭터의 스크롤 플로우차트.pptx
+++ b/game-design/sbs-game-academy/화면 및 캐릭터의 스크롤 플로우차트.pptx
@@ -3701,7 +3701,7 @@
             <a:pPr algn="ctr"/>
             <a:r>
               <a:rPr lang="ko-KR" altLang="en-US" sz="1000" b="1" dirty="0"/>
-              <a:t>특정 영역에서 벗어났는가</a:t>
+              <a:t>스크롤 기준 영역을 벗어났는가</a:t>
             </a:r>
             <a:r>
               <a:rPr lang="en-US" altLang="ko-KR" sz="1000" b="1" dirty="0"/>
@@ -3725,7 +3725,7 @@
         </p:nvSpPr>
         <p:spPr>
           <a:xfrm>
-            <a:off x="6571455" y="3789642"/>
+            <a:off x="6577911" y="4585371"/>
             <a:ext cx="1510018" cy="572915"/>
           </a:xfrm>
           <a:prstGeom prst="flowChartDecision">
@@ -4396,7 +4396,7 @@
         </p:nvSpPr>
         <p:spPr>
           <a:xfrm>
-            <a:off x="6693259" y="5006158"/>
+            <a:off x="6693259" y="5422983"/>
             <a:ext cx="1279322" cy="360727"/>
           </a:xfrm>
           <a:prstGeom prst="flowChartProcess">
@@ -4452,14 +4452,14 @@
           <p:cNvCxnSpPr>
             <a:cxnSpLocks/>
             <a:stCxn id="10" idx="2"/>
-            <a:endCxn id="193" idx="0"/>
+            <a:endCxn id="510" idx="0"/>
           </p:cNvCxnSpPr>
           <p:nvPr/>
         </p:nvCxnSpPr>
         <p:spPr>
           <a:xfrm>
             <a:off x="7321207" y="2474587"/>
-            <a:ext cx="5257" cy="1315055"/>
+            <a:ext cx="0" cy="347061"/>
           </a:xfrm>
           <a:prstGeom prst="straightConnector1">
             <a:avLst/>
@@ -4725,7 +4725,7 @@
         </p:nvCxnSpPr>
         <p:spPr>
           <a:xfrm flipH="1">
-            <a:off x="4766081" y="5186522"/>
+            <a:off x="4766081" y="5603347"/>
             <a:ext cx="1927178" cy="0"/>
           </a:xfrm>
           <a:prstGeom prst="straightConnector1">
@@ -4761,18 +4761,18 @@
           </p:cNvPr>
           <p:cNvCxnSpPr>
             <a:cxnSpLocks/>
-            <a:stCxn id="193" idx="3"/>
+            <a:stCxn id="510" idx="3"/>
           </p:cNvCxnSpPr>
           <p:nvPr/>
         </p:nvCxnSpPr>
         <p:spPr>
           <a:xfrm flipH="1" flipV="1">
-            <a:off x="4757161" y="1431826"/>
-            <a:ext cx="3324312" cy="2644274"/>
+            <a:off x="4763292" y="696406"/>
+            <a:ext cx="3312924" cy="2411700"/>
           </a:xfrm>
           <a:prstGeom prst="bentConnector3">
             <a:avLst>
-              <a:gd name="adj1" fmla="val -6877"/>
+              <a:gd name="adj1" fmla="val -6900"/>
             </a:avLst>
           </a:prstGeom>
           <a:ln>
@@ -4859,8 +4859,8 @@
         </p:nvCxnSpPr>
         <p:spPr>
           <a:xfrm>
-            <a:off x="7326464" y="4362557"/>
-            <a:ext cx="6456" cy="643601"/>
+            <a:off x="7332920" y="5158286"/>
+            <a:ext cx="0" cy="264697"/>
           </a:xfrm>
           <a:prstGeom prst="straightConnector1">
             <a:avLst/>
@@ -4898,7 +4898,7 @@
         </p:nvSpPr>
         <p:spPr>
           <a:xfrm>
-            <a:off x="7321207" y="4522320"/>
+            <a:off x="7332920" y="3401038"/>
             <a:ext cx="410690" cy="246221"/>
           </a:xfrm>
           <a:prstGeom prst="rect">
@@ -4923,6 +4923,464 @@
             <a:endParaRPr lang="ko-KR" altLang="en-US" sz="1000" b="1" dirty="0">
               <a:solidFill>
                 <a:schemeClr val="accent1"/>
+              </a:solidFill>
+            </a:endParaRPr>
+          </a:p>
+        </p:txBody>
+      </p:sp>
+      <p:sp>
+        <p:nvSpPr>
+          <p:cNvPr id="510" name="순서도: 판단 509">
+            <a:extLst>
+              <a:ext uri="{FF2B5EF4-FFF2-40B4-BE49-F238E27FC236}">
+                <a16:creationId xmlns:a16="http://schemas.microsoft.com/office/drawing/2014/main" id="{0ED7A609-E654-4E2B-8B96-F7B8213F48D8}"/>
+              </a:ext>
+            </a:extLst>
+          </p:cNvPr>
+          <p:cNvSpPr/>
+          <p:nvPr/>
+        </p:nvSpPr>
+        <p:spPr>
+          <a:xfrm>
+            <a:off x="6566198" y="2821648"/>
+            <a:ext cx="1510018" cy="572915"/>
+          </a:xfrm>
+          <a:prstGeom prst="flowChartDecision">
+            <a:avLst/>
+          </a:prstGeom>
+        </p:spPr>
+        <p:style>
+          <a:lnRef idx="2">
+            <a:schemeClr val="accent1">
+              <a:shade val="50000"/>
+            </a:schemeClr>
+          </a:lnRef>
+          <a:fillRef idx="1">
+            <a:schemeClr val="accent1"/>
+          </a:fillRef>
+          <a:effectRef idx="0">
+            <a:schemeClr val="accent1"/>
+          </a:effectRef>
+          <a:fontRef idx="minor">
+            <a:schemeClr val="lt1"/>
+          </a:fontRef>
+        </p:style>
+        <p:txBody>
+          <a:bodyPr rtlCol="0" anchor="ctr"/>
+          <a:lstStyle/>
+          <a:p>
+            <a:pPr algn="ctr"/>
+            <a:r>
+              <a:rPr lang="ko-KR" altLang="en-US" sz="1000" b="1" dirty="0"/>
+              <a:t>화면 끝 도달</a:t>
+            </a:r>
+            <a:r>
+              <a:rPr lang="en-US" altLang="ko-KR" sz="1000" b="1" dirty="0"/>
+              <a:t>?</a:t>
+            </a:r>
+          </a:p>
+        </p:txBody>
+      </p:sp>
+      <p:cxnSp>
+        <p:nvCxnSpPr>
+          <p:cNvPr id="514" name="직선 화살표 연결선 513">
+            <a:extLst>
+              <a:ext uri="{FF2B5EF4-FFF2-40B4-BE49-F238E27FC236}">
+                <a16:creationId xmlns:a16="http://schemas.microsoft.com/office/drawing/2014/main" id="{895E37A5-E3C0-45DD-AA2D-B43F918BC2C7}"/>
+              </a:ext>
+            </a:extLst>
+          </p:cNvPr>
+          <p:cNvCxnSpPr>
+            <a:cxnSpLocks/>
+            <a:stCxn id="510" idx="2"/>
+            <a:endCxn id="520" idx="0"/>
+          </p:cNvCxnSpPr>
+          <p:nvPr/>
+        </p:nvCxnSpPr>
+        <p:spPr>
+          <a:xfrm>
+            <a:off x="7321207" y="3394563"/>
+            <a:ext cx="0" cy="353197"/>
+          </a:xfrm>
+          <a:prstGeom prst="straightConnector1">
+            <a:avLst/>
+          </a:prstGeom>
+          <a:ln>
+            <a:tailEnd type="triangle"/>
+          </a:ln>
+        </p:spPr>
+        <p:style>
+          <a:lnRef idx="3">
+            <a:schemeClr val="accent1"/>
+          </a:lnRef>
+          <a:fillRef idx="0">
+            <a:schemeClr val="accent1"/>
+          </a:fillRef>
+          <a:effectRef idx="2">
+            <a:schemeClr val="accent1"/>
+          </a:effectRef>
+          <a:fontRef idx="minor">
+            <a:schemeClr val="tx1"/>
+          </a:fontRef>
+        </p:style>
+      </p:cxnSp>
+      <p:sp>
+        <p:nvSpPr>
+          <p:cNvPr id="520" name="순서도: 판단 519">
+            <a:extLst>
+              <a:ext uri="{FF2B5EF4-FFF2-40B4-BE49-F238E27FC236}">
+                <a16:creationId xmlns:a16="http://schemas.microsoft.com/office/drawing/2014/main" id="{FDD5034B-E272-424E-B9EC-2F9A39A51D9A}"/>
+              </a:ext>
+            </a:extLst>
+          </p:cNvPr>
+          <p:cNvSpPr/>
+          <p:nvPr/>
+        </p:nvSpPr>
+        <p:spPr>
+          <a:xfrm>
+            <a:off x="6566198" y="3747760"/>
+            <a:ext cx="1510018" cy="572915"/>
+          </a:xfrm>
+          <a:prstGeom prst="flowChartDecision">
+            <a:avLst/>
+          </a:prstGeom>
+        </p:spPr>
+        <p:style>
+          <a:lnRef idx="2">
+            <a:schemeClr val="accent1">
+              <a:shade val="50000"/>
+            </a:schemeClr>
+          </a:lnRef>
+          <a:fillRef idx="1">
+            <a:schemeClr val="accent1"/>
+          </a:fillRef>
+          <a:effectRef idx="0">
+            <a:schemeClr val="accent1"/>
+          </a:effectRef>
+          <a:fontRef idx="minor">
+            <a:schemeClr val="lt1"/>
+          </a:fontRef>
+        </p:style>
+        <p:txBody>
+          <a:bodyPr rtlCol="0" anchor="ctr"/>
+          <a:lstStyle/>
+          <a:p>
+            <a:pPr algn="ctr"/>
+            <a:r>
+              <a:rPr lang="ko-KR" altLang="en-US" sz="1000" b="1" dirty="0"/>
+              <a:t>왼쪽 끝 도달</a:t>
+            </a:r>
+            <a:r>
+              <a:rPr lang="en-US" altLang="ko-KR" sz="1000" b="1" dirty="0"/>
+              <a:t>?</a:t>
+            </a:r>
+          </a:p>
+        </p:txBody>
+      </p:sp>
+      <p:cxnSp>
+        <p:nvCxnSpPr>
+          <p:cNvPr id="530" name="직선 화살표 연결선 529">
+            <a:extLst>
+              <a:ext uri="{FF2B5EF4-FFF2-40B4-BE49-F238E27FC236}">
+                <a16:creationId xmlns:a16="http://schemas.microsoft.com/office/drawing/2014/main" id="{1E6F03EB-9BE4-484B-8505-81A75C72DE03}"/>
+              </a:ext>
+            </a:extLst>
+          </p:cNvPr>
+          <p:cNvCxnSpPr>
+            <a:cxnSpLocks/>
+            <a:stCxn id="520" idx="1"/>
+          </p:cNvCxnSpPr>
+          <p:nvPr/>
+        </p:nvCxnSpPr>
+        <p:spPr>
+          <a:xfrm rot="10800000" flipV="1">
+            <a:off x="5823212" y="4034218"/>
+            <a:ext cx="742986" cy="1569128"/>
+          </a:xfrm>
+          <a:prstGeom prst="bentConnector2">
+            <a:avLst/>
+          </a:prstGeom>
+          <a:ln>
+            <a:tailEnd type="triangle"/>
+          </a:ln>
+        </p:spPr>
+        <p:style>
+          <a:lnRef idx="3">
+            <a:schemeClr val="accent1"/>
+          </a:lnRef>
+          <a:fillRef idx="0">
+            <a:schemeClr val="accent1"/>
+          </a:fillRef>
+          <a:effectRef idx="2">
+            <a:schemeClr val="accent1"/>
+          </a:effectRef>
+          <a:fontRef idx="minor">
+            <a:schemeClr val="tx1"/>
+          </a:fontRef>
+        </p:style>
+      </p:cxnSp>
+      <p:cxnSp>
+        <p:nvCxnSpPr>
+          <p:cNvPr id="533" name="연결선: 꺾임 532">
+            <a:extLst>
+              <a:ext uri="{FF2B5EF4-FFF2-40B4-BE49-F238E27FC236}">
+                <a16:creationId xmlns:a16="http://schemas.microsoft.com/office/drawing/2014/main" id="{5AF913FF-27BC-44E3-BE75-13967C4EF412}"/>
+              </a:ext>
+            </a:extLst>
+          </p:cNvPr>
+          <p:cNvCxnSpPr>
+            <a:cxnSpLocks/>
+            <a:stCxn id="520" idx="2"/>
+            <a:endCxn id="193" idx="0"/>
+          </p:cNvCxnSpPr>
+          <p:nvPr/>
+        </p:nvCxnSpPr>
+        <p:spPr>
+          <a:xfrm>
+            <a:off x="7321207" y="4320675"/>
+            <a:ext cx="11713" cy="264696"/>
+          </a:xfrm>
+          <a:prstGeom prst="straightConnector1">
+            <a:avLst/>
+          </a:prstGeom>
+          <a:ln>
+            <a:solidFill>
+              <a:srgbClr val="FF0000"/>
+            </a:solidFill>
+            <a:tailEnd type="triangle"/>
+          </a:ln>
+        </p:spPr>
+        <p:style>
+          <a:lnRef idx="3">
+            <a:schemeClr val="accent2"/>
+          </a:lnRef>
+          <a:fillRef idx="0">
+            <a:schemeClr val="accent2"/>
+          </a:fillRef>
+          <a:effectRef idx="2">
+            <a:schemeClr val="accent2"/>
+          </a:effectRef>
+          <a:fontRef idx="minor">
+            <a:schemeClr val="tx1"/>
+          </a:fontRef>
+        </p:style>
+      </p:cxnSp>
+      <p:sp>
+        <p:nvSpPr>
+          <p:cNvPr id="538" name="TextBox 537">
+            <a:extLst>
+              <a:ext uri="{FF2B5EF4-FFF2-40B4-BE49-F238E27FC236}">
+                <a16:creationId xmlns:a16="http://schemas.microsoft.com/office/drawing/2014/main" id="{D2275439-D4C8-47AD-80F2-F7964CBCD5A2}"/>
+              </a:ext>
+            </a:extLst>
+          </p:cNvPr>
+          <p:cNvSpPr txBox="1"/>
+          <p:nvPr/>
+        </p:nvSpPr>
+        <p:spPr>
+          <a:xfrm>
+            <a:off x="7321207" y="4360911"/>
+            <a:ext cx="378705" cy="246221"/>
+          </a:xfrm>
+          <a:prstGeom prst="rect">
+            <a:avLst/>
+          </a:prstGeom>
+          <a:noFill/>
+        </p:spPr>
+        <p:txBody>
+          <a:bodyPr wrap="square" rtlCol="0">
+            <a:spAutoFit/>
+          </a:bodyPr>
+          <a:lstStyle/>
+          <a:p>
+            <a:r>
+              <a:rPr lang="en-US" altLang="ko-KR" sz="1000" b="1" dirty="0">
+                <a:solidFill>
+                  <a:srgbClr val="FF0000"/>
+                </a:solidFill>
+              </a:rPr>
+              <a:t>N</a:t>
+            </a:r>
+            <a:endParaRPr lang="ko-KR" altLang="en-US" sz="1000" b="1" dirty="0">
+              <a:solidFill>
+                <a:srgbClr val="FF0000"/>
+              </a:solidFill>
+            </a:endParaRPr>
+          </a:p>
+        </p:txBody>
+      </p:sp>
+      <p:sp>
+        <p:nvSpPr>
+          <p:cNvPr id="539" name="TextBox 538">
+            <a:extLst>
+              <a:ext uri="{FF2B5EF4-FFF2-40B4-BE49-F238E27FC236}">
+                <a16:creationId xmlns:a16="http://schemas.microsoft.com/office/drawing/2014/main" id="{F2A1FA46-BF9F-4199-AADA-E3A22DDAAC7B}"/>
+              </a:ext>
+            </a:extLst>
+          </p:cNvPr>
+          <p:cNvSpPr txBox="1"/>
+          <p:nvPr/>
+        </p:nvSpPr>
+        <p:spPr>
+          <a:xfrm>
+            <a:off x="7294870" y="5158286"/>
+            <a:ext cx="410690" cy="246221"/>
+          </a:xfrm>
+          <a:prstGeom prst="rect">
+            <a:avLst/>
+          </a:prstGeom>
+          <a:noFill/>
+        </p:spPr>
+        <p:txBody>
+          <a:bodyPr wrap="square" rtlCol="0">
+            <a:spAutoFit/>
+          </a:bodyPr>
+          <a:lstStyle/>
+          <a:p>
+            <a:r>
+              <a:rPr lang="en-US" altLang="ko-KR" sz="1000" b="1" dirty="0">
+                <a:solidFill>
+                  <a:schemeClr val="accent1"/>
+                </a:solidFill>
+              </a:rPr>
+              <a:t>Y</a:t>
+            </a:r>
+            <a:endParaRPr lang="ko-KR" altLang="en-US" sz="1000" b="1" dirty="0">
+              <a:solidFill>
+                <a:schemeClr val="accent1"/>
+              </a:solidFill>
+            </a:endParaRPr>
+          </a:p>
+        </p:txBody>
+      </p:sp>
+      <p:sp>
+        <p:nvSpPr>
+          <p:cNvPr id="540" name="TextBox 539">
+            <a:extLst>
+              <a:ext uri="{FF2B5EF4-FFF2-40B4-BE49-F238E27FC236}">
+                <a16:creationId xmlns:a16="http://schemas.microsoft.com/office/drawing/2014/main" id="{983178D1-C894-46C1-A33C-F72D3B4BB98C}"/>
+              </a:ext>
+            </a:extLst>
+          </p:cNvPr>
+          <p:cNvSpPr txBox="1"/>
+          <p:nvPr/>
+        </p:nvSpPr>
+        <p:spPr>
+          <a:xfrm>
+            <a:off x="5745964" y="4641053"/>
+            <a:ext cx="410690" cy="246221"/>
+          </a:xfrm>
+          <a:prstGeom prst="rect">
+            <a:avLst/>
+          </a:prstGeom>
+          <a:noFill/>
+        </p:spPr>
+        <p:txBody>
+          <a:bodyPr wrap="square" rtlCol="0">
+            <a:spAutoFit/>
+          </a:bodyPr>
+          <a:lstStyle/>
+          <a:p>
+            <a:r>
+              <a:rPr lang="en-US" altLang="ko-KR" sz="1000" b="1" dirty="0">
+                <a:solidFill>
+                  <a:schemeClr val="accent1"/>
+                </a:solidFill>
+              </a:rPr>
+              <a:t>Y</a:t>
+            </a:r>
+            <a:endParaRPr lang="ko-KR" altLang="en-US" sz="1000" b="1" dirty="0">
+              <a:solidFill>
+                <a:schemeClr val="accent1"/>
+              </a:solidFill>
+            </a:endParaRPr>
+          </a:p>
+        </p:txBody>
+      </p:sp>
+      <p:cxnSp>
+        <p:nvCxnSpPr>
+          <p:cNvPr id="541" name="연결선: 꺾임 540">
+            <a:extLst>
+              <a:ext uri="{FF2B5EF4-FFF2-40B4-BE49-F238E27FC236}">
+                <a16:creationId xmlns:a16="http://schemas.microsoft.com/office/drawing/2014/main" id="{8695BCDF-E198-4A08-BBE6-65B3D9715086}"/>
+              </a:ext>
+            </a:extLst>
+          </p:cNvPr>
+          <p:cNvCxnSpPr>
+            <a:cxnSpLocks/>
+            <a:stCxn id="193" idx="1"/>
+          </p:cNvCxnSpPr>
+          <p:nvPr/>
+        </p:nvCxnSpPr>
+        <p:spPr>
+          <a:xfrm rot="10800000" flipV="1">
+            <a:off x="6096001" y="4871828"/>
+            <a:ext cx="481911" cy="731517"/>
+          </a:xfrm>
+          <a:prstGeom prst="bentConnector2">
+            <a:avLst/>
+          </a:prstGeom>
+          <a:ln>
+            <a:solidFill>
+              <a:srgbClr val="FF0000"/>
+            </a:solidFill>
+            <a:tailEnd type="triangle"/>
+          </a:ln>
+        </p:spPr>
+        <p:style>
+          <a:lnRef idx="3">
+            <a:schemeClr val="accent2"/>
+          </a:lnRef>
+          <a:fillRef idx="0">
+            <a:schemeClr val="accent2"/>
+          </a:fillRef>
+          <a:effectRef idx="2">
+            <a:schemeClr val="accent2"/>
+          </a:effectRef>
+          <a:fontRef idx="minor">
+            <a:schemeClr val="tx1"/>
+          </a:fontRef>
+        </p:style>
+      </p:cxnSp>
+      <p:sp>
+        <p:nvSpPr>
+          <p:cNvPr id="545" name="TextBox 544">
+            <a:extLst>
+              <a:ext uri="{FF2B5EF4-FFF2-40B4-BE49-F238E27FC236}">
+                <a16:creationId xmlns:a16="http://schemas.microsoft.com/office/drawing/2014/main" id="{DFF99D9A-0938-4EB2-AB5A-EB242D23DA24}"/>
+              </a:ext>
+            </a:extLst>
+          </p:cNvPr>
+          <p:cNvSpPr txBox="1"/>
+          <p:nvPr/>
+        </p:nvSpPr>
+        <p:spPr>
+          <a:xfrm>
+            <a:off x="6210920" y="4841810"/>
+            <a:ext cx="378705" cy="246221"/>
+          </a:xfrm>
+          <a:prstGeom prst="rect">
+            <a:avLst/>
+          </a:prstGeom>
+          <a:noFill/>
+        </p:spPr>
+        <p:txBody>
+          <a:bodyPr wrap="square" rtlCol="0">
+            <a:spAutoFit/>
+          </a:bodyPr>
+          <a:lstStyle/>
+          <a:p>
+            <a:r>
+              <a:rPr lang="en-US" altLang="ko-KR" sz="1000" b="1" dirty="0">
+                <a:solidFill>
+                  <a:srgbClr val="FF0000"/>
+                </a:solidFill>
+              </a:rPr>
+              <a:t>N</a:t>
+            </a:r>
+            <a:endParaRPr lang="ko-KR" altLang="en-US" sz="1000" b="1" dirty="0">
+              <a:solidFill>
+                <a:srgbClr val="FF0000"/>
               </a:solidFill>
             </a:endParaRPr>
           </a:p>
